--- a/A_Corp_AI_Proposal_Sample.pptx
+++ b/A_Corp_AI_Proposal_Sample.pptx
@@ -13543,7 +13543,7 @@
                 <a:ea typeface="Pretendard" pitchFamily="34" charset="-122"/>
                 <a:cs typeface="Pretendard" pitchFamily="34" charset="-120"/>
               </a:rPr>
-              <a:t>같은 질문에 답이 3~5일 대신 30분 안에 오도록 만드는 작업입니다.</a:t>
+              <a:t>같은 질문에 대한 원인 후보를 3~5일이 아니라 30분 안에 받아볼 수 있게 만드는 구조입니다.</a:t>
             </a:r>
             <a:endParaRPr lang="en-US" sz="1200" dirty="0"/>
           </a:p>
